--- a/powerpoints/Pokerbot_Upgrade_Week5.pptx
+++ b/powerpoints/Pokerbot_Upgrade_Week5.pptx
@@ -663,13 +663,19 @@
           <a:lstStyle/>
           <a:p>
             <a:r>
-              <a:t>Dit is het getal waar bijna iedereen intuïtief naast zit. Vraag het eerst aan de zaal: 'wat is een góede winkans?' — je krijgt 60, 70, 80.</a:t>
+              <a:t>Vraag het eerst aan de zaal: 'wat is een góede winkans?' Je krijgt 60, 70, 80 — en dat klopt alleen als je tegen één iemand speelt.</a:t>
             </a:r>
           </a:p>
           <a:p/>
           <a:p>
             <a:r>
-              <a:t>Het mooie is dat de regel meeschaalt: als er nog maar één tegenstander over is, is je eerlijke deel 50%, en dan is dezelfde hand ineens wél een raise. In 1D leren ze het aantal tegenstanders uit de actielijst te schatten.</a:t>
+              <a:t>Het punt is niet welk getal ze kiezen, maar dát ze er één kiezen en hun drempels erop afstemmen. Wie tegen 5 rekent en een drempel van 50 aanhoudt, heeft een bot die foldt.</a:t>
+            </a:r>
+          </a:p>
+          <a:p/>
+          <a:p>
+            <a:r>
+              <a:t>In 1D staat hoe je het aantal tegenstanders kunt schatten uit de actielijst. Dat mag, maar dan moeten de drempels meeschuiven — dat staat er expliciet bij.</a:t>
             </a:r>
           </a:p>
         </p:txBody>
@@ -5015,7 +5021,7 @@
               </a:defRPr>
             </a:pPr>
             <a:r>
-              <a:t>1B · HET IJKPUNT</a:t>
+              <a:t>1B · DE SCHAAL</a:t>
             </a:r>
           </a:p>
           <a:p>
@@ -5030,7 +5036,7 @@
               </a:defRPr>
             </a:pPr>
             <a:r>
-              <a:t>16,7% — niet 50%</a:t>
+              <a:t>Waar komen je drempels vandaan?</a:t>
             </a:r>
           </a:p>
         </p:txBody>
@@ -5113,22 +5119,22 @@
               </a:defRPr>
             </a:pPr>
             <a:r>
-              <a:t>Aan een tafel van zes wint ieder 1 op de 6 keer, als iedereen even sterk is.</a:t>
+              <a:t>schat_winkans(..., tegenstanders=N) verandert je hand niet —</a:t>
             </a:r>
           </a:p>
           <a:p>
             <a:pPr>
               <a:spcBef>
-                <a:spcPts val="800"/>
+                <a:spcPts val="200"/>
               </a:spcBef>
               <a:defRPr sz="1600" b="1">
                 <a:solidFill>
-                  <a:srgbClr val="1B4D3E"/>
+                  <a:srgbClr val="121E31"/>
                 </a:solidFill>
               </a:defRPr>
             </a:pPr>
             <a:r>
-              <a:t>Je eerlijke deel is dus 100 / 6 = 16,7%. Dát is de maat, niet 50.</a:t>
+              <a:t>het verandert de schaal waarop je hem afleest.</a:t>
             </a:r>
           </a:p>
           <a:p>
@@ -5136,6 +5142,22 @@
               <a:spcBef>
                 <a:spcPts val="1800"/>
               </a:spcBef>
+              <a:defRPr sz="1300" b="1">
+                <a:solidFill>
+                  <a:srgbClr val="505A64"/>
+                </a:solidFill>
+                <a:latin typeface="Consolas"/>
+              </a:defRPr>
+            </a:pPr>
+            <a:r>
+              <a:t>tegenstanders    gemiddelde hand wint    'goed' begint rond</a:t>
+            </a:r>
+          </a:p>
+          <a:p>
+            <a:pPr>
+              <a:spcBef>
+                <a:spcPts val="600"/>
+              </a:spcBef>
               <a:defRPr sz="1400" b="0">
                 <a:solidFill>
                   <a:srgbClr val="121E31"/>
@@ -5144,7 +5166,23 @@
               </a:defRPr>
             </a:pPr>
             <a:r>
-              <a:t>de middelste starthand tegen 5 tegenstanders    16,0%</a:t>
+              <a:t>      1                  50%                    60%</a:t>
+            </a:r>
+          </a:p>
+          <a:p>
+            <a:pPr>
+              <a:spcBef>
+                <a:spcPts val="400"/>
+              </a:spcBef>
+              <a:defRPr sz="1400" b="1">
+                <a:solidFill>
+                  <a:srgbClr val="1B4D3E"/>
+                </a:solidFill>
+                <a:latin typeface="Consolas"/>
+              </a:defRPr>
+            </a:pPr>
+            <a:r>
+              <a:t>      2                  33%                    45%</a:t>
             </a:r>
           </a:p>
           <a:p>
@@ -5160,23 +5198,7 @@
               </a:defRPr>
             </a:pPr>
             <a:r>
-              <a:t>de beste 10% van de handen                      boven 25,0%</a:t>
-            </a:r>
-          </a:p>
-          <a:p>
-            <a:pPr>
-              <a:spcBef>
-                <a:spcPts val="400"/>
-              </a:spcBef>
-              <a:defRPr sz="1400" b="1">
-                <a:solidFill>
-                  <a:srgbClr val="121E31"/>
-                </a:solidFill>
-                <a:latin typeface="Consolas"/>
-              </a:defRPr>
-            </a:pPr>
-            <a:r>
-              <a:t>A-A, de beste hand die bestaat                  50,2%</a:t>
+              <a:t>      5                  17%                    25%</a:t>
             </a:r>
           </a:p>
           <a:p>
@@ -5184,6 +5206,21 @@
               <a:spcBef>
                 <a:spcPts val="1800"/>
               </a:spcBef>
+              <a:defRPr sz="1400" b="1">
+                <a:solidFill>
+                  <a:srgbClr val="121E31"/>
+                </a:solidFill>
+              </a:defRPr>
+            </a:pPr>
+            <a:r>
+              <a:t>Kies één getal, houd het vast, en kies je drempels op díe schaal. De bot in Deel 2 rekent met 2.</a:t>
+            </a:r>
+          </a:p>
+          <a:p>
+            <a:pPr>
+              <a:spcBef>
+                <a:spcPts val="1200"/>
+              </a:spcBef>
               <a:defRPr sz="1300" b="0">
                 <a:solidFill>
                   <a:srgbClr val="B3261E"/>
@@ -5191,7 +5228,7 @@
               </a:defRPr>
             </a:pPr>
             <a:r>
-              <a:t>Zet je drempel op 50 en je speelt nooit mee. Vorig jaar was 92% van alle beslissingen in het toernooi een fold — dit is waarom.</a:t>
+              <a:t>Zet je drempel op 50 terwijl je tegen vijf rekent, dan doe je nooit mee — zelfs A-A haalt daar 50,2%. Vorig jaar was 92% van alle beslissingen een fold.</a:t>
             </a:r>
           </a:p>
         </p:txBody>
